--- a/dist/초1/수학/모양과비교/초1_수학_모양과비교_03_길이와높이비교_학생용.pptx
+++ b/dist/초1/수학/모양과비교/초1_수학_모양과비교_03_길이와높이비교_학생용.pptx
@@ -119,13 +119,13 @@
   <p:extLst>
     <p:ext uri="{521415D9-36F7-43E2-AB2F-B90AF26B5E84}">
       <p14:sectionLst xmlns:p14="http://schemas.microsoft.com/office/powerpoint/2010/main">
-        <p14:section name="도입" id="{6e35f14d-9d01-eac3-fda0-4f423bf871fa}">
+        <p14:section name="도입" id="{34694c31-7e6c-2340-1b38-5fa8b7872736}">
           <p14:sldIdLst>
             <p14:sldId id="256"/>
             <p14:sldId id="257"/>
           </p14:sldIdLst>
         </p14:section>
-        <p14:section name="개념" id="{ab74c671-c04f-769d-a4c7-bd40caa821e9}">
+        <p14:section name="개념" id="{8ea17958-1688-cc3d-a091-c139b2073d69}">
           <p14:sldIdLst>
             <p14:sldId id="258"/>
             <p14:sldId id="259"/>
@@ -133,25 +133,25 @@
             <p14:sldId id="261"/>
           </p14:sldIdLst>
         </p14:section>
-        <p14:section name="연습" id="{2711b522-c33a-decf-66e0-08d8fd66e5b4}">
+        <p14:section name="연습" id="{2fa1dc56-aaab-4473-4493-075a189cd9dd}">
           <p14:sldIdLst>
             <p14:sldId id="262"/>
             <p14:sldId id="263"/>
             <p14:sldId id="264"/>
           </p14:sldIdLst>
         </p14:section>
-        <p14:section name="확인" id="{99319753-baea-d093-0417-6d27469cd6aa}">
+        <p14:section name="확인" id="{7f660f87-80c9-3a5f-8d92-3d444533876c}">
           <p14:sldIdLst>
             <p14:sldId id="265"/>
             <p14:sldId id="266"/>
           </p14:sldIdLst>
         </p14:section>
-        <p14:section name="정리" id="{9ea1f739-2892-13df-390f-0801c56b2023}">
+        <p14:section name="정리" id="{8acbafc6-02e9-5836-0738-b4e8b8c76ef7}">
           <p14:sldIdLst>
             <p14:sldId id="267"/>
           </p14:sldIdLst>
         </p14:section>
-        <p14:section name="보충" id="{bc6b679c-b726-8c55-ec5a-2687134995a1}">
+        <p14:section name="보충" id="{063627fe-b748-1008-2e87-f7ef7fba8714}">
           <p14:sldIdLst>
             <p14:sldId id="268"/>
           </p14:sldIdLst>
@@ -4884,7 +4884,7 @@
                 <a:ea typeface="맑은 고딕" pitchFamily="34" charset="-122"/>
                 <a:cs typeface="맑은 고딕" pitchFamily="34" charset="-120"/>
               </a:rPr>
-              <a:t>보충: 어느 쪽이 더 많을까?</a:t>
+              <a:t>보충: 더 많은 쪽은?</a:t>
             </a:r>
             <a:endParaRPr lang="ko-KR" sz="4400" dirty="0"/>
           </a:p>

--- a/dist/초1/수학/모양과비교/초1_수학_모양과비교_03_길이와높이비교_학생용.pptx
+++ b/dist/초1/수학/모양과비교/초1_수학_모양과비교_03_길이와높이비교_학생용.pptx
@@ -119,13 +119,13 @@
   <p:extLst>
     <p:ext uri="{521415D9-36F7-43E2-AB2F-B90AF26B5E84}">
       <p14:sectionLst xmlns:p14="http://schemas.microsoft.com/office/powerpoint/2010/main">
-        <p14:section name="도입" id="{34694c31-7e6c-2340-1b38-5fa8b7872736}">
+        <p14:section name="도입" id="{26590d59-f0b0-13c6-e891-4fa10fa75e7c}">
           <p14:sldIdLst>
             <p14:sldId id="256"/>
             <p14:sldId id="257"/>
           </p14:sldIdLst>
         </p14:section>
-        <p14:section name="개념" id="{8ea17958-1688-cc3d-a091-c139b2073d69}">
+        <p14:section name="개념" id="{72b3ec5c-23d4-25bf-f6ac-1be81f9c3e1a}">
           <p14:sldIdLst>
             <p14:sldId id="258"/>
             <p14:sldId id="259"/>
@@ -133,25 +133,25 @@
             <p14:sldId id="261"/>
           </p14:sldIdLst>
         </p14:section>
-        <p14:section name="연습" id="{2fa1dc56-aaab-4473-4493-075a189cd9dd}">
+        <p14:section name="연습" id="{56228c5b-9bca-3fb7-d5bb-362915083d04}">
           <p14:sldIdLst>
             <p14:sldId id="262"/>
             <p14:sldId id="263"/>
             <p14:sldId id="264"/>
           </p14:sldIdLst>
         </p14:section>
-        <p14:section name="확인" id="{7f660f87-80c9-3a5f-8d92-3d444533876c}">
+        <p14:section name="확인" id="{296345fa-9aef-c23b-ba65-c0f45a0c8c5c}">
           <p14:sldIdLst>
             <p14:sldId id="265"/>
             <p14:sldId id="266"/>
           </p14:sldIdLst>
         </p14:section>
-        <p14:section name="정리" id="{8acbafc6-02e9-5836-0738-b4e8b8c76ef7}">
+        <p14:section name="정리" id="{e51710c0-4ea2-d312-c39f-116f3fd02c58}">
           <p14:sldIdLst>
             <p14:sldId id="267"/>
           </p14:sldIdLst>
         </p14:section>
-        <p14:section name="보충" id="{063627fe-b748-1008-2e87-f7ef7fba8714}">
+        <p14:section name="보충" id="{c4302579-2a06-61ff-569b-e481b216bd0b}">
           <p14:sldIdLst>
             <p14:sldId id="268"/>
           </p14:sldIdLst>

--- a/dist/초1/수학/모양과비교/초1_수학_모양과비교_03_길이와높이비교_학생용.pptx
+++ b/dist/초1/수학/모양과비교/초1_수학_모양과비교_03_길이와높이비교_학생용.pptx
@@ -119,13 +119,13 @@
   <p:extLst>
     <p:ext uri="{521415D9-36F7-43E2-AB2F-B90AF26B5E84}">
       <p14:sectionLst xmlns:p14="http://schemas.microsoft.com/office/powerpoint/2010/main">
-        <p14:section name="도입" id="{26590d59-f0b0-13c6-e891-4fa10fa75e7c}">
+        <p14:section name="도입" id="{2f396d0a-9b7f-6ab9-d2b7-07805ee42436}">
           <p14:sldIdLst>
             <p14:sldId id="256"/>
             <p14:sldId id="257"/>
           </p14:sldIdLst>
         </p14:section>
-        <p14:section name="개념" id="{72b3ec5c-23d4-25bf-f6ac-1be81f9c3e1a}">
+        <p14:section name="개념" id="{3c263131-7432-ebae-beec-d8f8321f8b20}">
           <p14:sldIdLst>
             <p14:sldId id="258"/>
             <p14:sldId id="259"/>
@@ -133,25 +133,25 @@
             <p14:sldId id="261"/>
           </p14:sldIdLst>
         </p14:section>
-        <p14:section name="연습" id="{56228c5b-9bca-3fb7-d5bb-362915083d04}">
+        <p14:section name="연습" id="{c5d84d0a-a5db-4896-4948-8df03ad79768}">
           <p14:sldIdLst>
             <p14:sldId id="262"/>
             <p14:sldId id="263"/>
             <p14:sldId id="264"/>
           </p14:sldIdLst>
         </p14:section>
-        <p14:section name="확인" id="{296345fa-9aef-c23b-ba65-c0f45a0c8c5c}">
+        <p14:section name="확인" id="{c76cdecd-1b8b-2152-d854-2ea5fad96d28}">
           <p14:sldIdLst>
             <p14:sldId id="265"/>
             <p14:sldId id="266"/>
           </p14:sldIdLst>
         </p14:section>
-        <p14:section name="정리" id="{e51710c0-4ea2-d312-c39f-116f3fd02c58}">
+        <p14:section name="정리" id="{64d19ab9-faeb-14e0-9e93-cf0578ba88fe}">
           <p14:sldIdLst>
             <p14:sldId id="267"/>
           </p14:sldIdLst>
         </p14:section>
-        <p14:section name="보충" id="{c4302579-2a06-61ff-569b-e481b216bd0b}">
+        <p14:section name="보충" id="{f81ef6a6-9a3e-55df-47d3-a9e28933183f}">
           <p14:sldIdLst>
             <p14:sldId id="268"/>
           </p14:sldIdLst>
